--- a/public/e-poster-template.pptx
+++ b/public/e-poster-template.pptx
@@ -197,7 +197,7 @@
           <a:p>
             <a:fld id="{57805AB1-C79E-4EEB-A9F6-B08307C1ADF4}" type="datetimeFigureOut">
               <a:rPr lang="en-IN" smtClean="0"/>
-              <a:t>27-07-2026</a:t>
+              <a:t>31-08-2026</a:t>
             </a:fld>
             <a:endParaRPr lang="en-IN"/>
           </a:p>
@@ -683,7 +683,7 @@
           <a:p>
             <a:fld id="{2C845C1F-EB0C-4351-BEAF-60215E166217}" type="datetimeFigureOut">
               <a:rPr lang="en-IN" smtClean="0"/>
-              <a:t>27-07-2026</a:t>
+              <a:t>31-08-2026</a:t>
             </a:fld>
             <a:endParaRPr lang="en-IN"/>
           </a:p>
@@ -853,7 +853,7 @@
           <a:p>
             <a:fld id="{2C845C1F-EB0C-4351-BEAF-60215E166217}" type="datetimeFigureOut">
               <a:rPr lang="en-IN" smtClean="0"/>
-              <a:t>27-07-2026</a:t>
+              <a:t>31-08-2026</a:t>
             </a:fld>
             <a:endParaRPr lang="en-IN"/>
           </a:p>
@@ -1033,7 +1033,7 @@
           <a:p>
             <a:fld id="{2C845C1F-EB0C-4351-BEAF-60215E166217}" type="datetimeFigureOut">
               <a:rPr lang="en-IN" smtClean="0"/>
-              <a:t>27-07-2026</a:t>
+              <a:t>31-08-2026</a:t>
             </a:fld>
             <a:endParaRPr lang="en-IN"/>
           </a:p>
@@ -1203,7 +1203,7 @@
           <a:p>
             <a:fld id="{2C845C1F-EB0C-4351-BEAF-60215E166217}" type="datetimeFigureOut">
               <a:rPr lang="en-IN" smtClean="0"/>
-              <a:t>27-07-2026</a:t>
+              <a:t>31-08-2026</a:t>
             </a:fld>
             <a:endParaRPr lang="en-IN"/>
           </a:p>
@@ -1447,7 +1447,7 @@
           <a:p>
             <a:fld id="{2C845C1F-EB0C-4351-BEAF-60215E166217}" type="datetimeFigureOut">
               <a:rPr lang="en-IN" smtClean="0"/>
-              <a:t>27-07-2026</a:t>
+              <a:t>31-08-2026</a:t>
             </a:fld>
             <a:endParaRPr lang="en-IN"/>
           </a:p>
@@ -1679,7 +1679,7 @@
           <a:p>
             <a:fld id="{2C845C1F-EB0C-4351-BEAF-60215E166217}" type="datetimeFigureOut">
               <a:rPr lang="en-IN" smtClean="0"/>
-              <a:t>27-07-2026</a:t>
+              <a:t>31-08-2026</a:t>
             </a:fld>
             <a:endParaRPr lang="en-IN"/>
           </a:p>
@@ -2046,7 +2046,7 @@
           <a:p>
             <a:fld id="{2C845C1F-EB0C-4351-BEAF-60215E166217}" type="datetimeFigureOut">
               <a:rPr lang="en-IN" smtClean="0"/>
-              <a:t>27-07-2026</a:t>
+              <a:t>31-08-2026</a:t>
             </a:fld>
             <a:endParaRPr lang="en-IN"/>
           </a:p>
@@ -2164,7 +2164,7 @@
           <a:p>
             <a:fld id="{2C845C1F-EB0C-4351-BEAF-60215E166217}" type="datetimeFigureOut">
               <a:rPr lang="en-IN" smtClean="0"/>
-              <a:t>27-07-2026</a:t>
+              <a:t>31-08-2026</a:t>
             </a:fld>
             <a:endParaRPr lang="en-IN"/>
           </a:p>
@@ -2259,7 +2259,7 @@
           <a:p>
             <a:fld id="{2C845C1F-EB0C-4351-BEAF-60215E166217}" type="datetimeFigureOut">
               <a:rPr lang="en-IN" smtClean="0"/>
-              <a:t>27-07-2026</a:t>
+              <a:t>31-08-2026</a:t>
             </a:fld>
             <a:endParaRPr lang="en-IN"/>
           </a:p>
@@ -2536,7 +2536,7 @@
           <a:p>
             <a:fld id="{2C845C1F-EB0C-4351-BEAF-60215E166217}" type="datetimeFigureOut">
               <a:rPr lang="en-IN" smtClean="0"/>
-              <a:t>27-07-2026</a:t>
+              <a:t>31-08-2026</a:t>
             </a:fld>
             <a:endParaRPr lang="en-IN"/>
           </a:p>
@@ -2793,7 +2793,7 @@
           <a:p>
             <a:fld id="{2C845C1F-EB0C-4351-BEAF-60215E166217}" type="datetimeFigureOut">
               <a:rPr lang="en-IN" smtClean="0"/>
-              <a:t>27-07-2026</a:t>
+              <a:t>31-08-2026</a:t>
             </a:fld>
             <a:endParaRPr lang="en-IN"/>
           </a:p>
@@ -3006,7 +3006,7 @@
           <a:p>
             <a:fld id="{2C845C1F-EB0C-4351-BEAF-60215E166217}" type="datetimeFigureOut">
               <a:rPr lang="en-IN" smtClean="0"/>
-              <a:t>27-07-2026</a:t>
+              <a:t>31-08-2026</a:t>
             </a:fld>
             <a:endParaRPr lang="en-IN"/>
           </a:p>
@@ -6625,8 +6625,8 @@
         </p:nvSpPr>
         <p:spPr>
           <a:xfrm>
-            <a:off x="5706207" y="629620"/>
-            <a:ext cx="966107" cy="573429"/>
+            <a:off x="272953" y="652670"/>
+            <a:ext cx="1137394" cy="588717"/>
           </a:xfrm>
           <a:prstGeom prst="ellipse">
             <a:avLst/>
@@ -6670,6 +6670,16 @@
           <a:p>
             <a:pPr algn="ctr"/>
             <a:r>
+              <a:rPr lang="en-IN" sz="1200" b="1" dirty="0">
+                <a:solidFill>
+                  <a:srgbClr val="C00000"/>
+                </a:solidFill>
+                <a:latin typeface="Times New Roman" panose="02020603050405020304" pitchFamily="18" charset="0"/>
+                <a:cs typeface="Times New Roman" panose="02020603050405020304" pitchFamily="18" charset="0"/>
+              </a:rPr>
+              <a:t>CT-001</a:t>
+            </a:r>
+            <a:r>
               <a:rPr lang="en-IN" sz="1200" dirty="0">
                 <a:solidFill>
                   <a:srgbClr val="C00000"/>
@@ -6677,7 +6687,7 @@
                 <a:latin typeface="Times New Roman" panose="02020603050405020304" pitchFamily="18" charset="0"/>
                 <a:cs typeface="Times New Roman" panose="02020603050405020304" pitchFamily="18" charset="0"/>
               </a:rPr>
-              <a:t>CT-001 </a:t>
+              <a:t> </a:t>
             </a:r>
           </a:p>
         </p:txBody>
@@ -6704,8 +6714,8 @@
         </p:blipFill>
         <p:spPr>
           <a:xfrm>
-            <a:off x="272953" y="150842"/>
-            <a:ext cx="655347" cy="573429"/>
+            <a:off x="272954" y="150843"/>
+            <a:ext cx="505438" cy="442258"/>
           </a:xfrm>
           <a:prstGeom prst="roundRect">
             <a:avLst>
@@ -6770,8 +6780,8 @@
         </p:blipFill>
         <p:spPr>
           <a:xfrm>
-            <a:off x="317779" y="738248"/>
-            <a:ext cx="574048" cy="574048"/>
+            <a:off x="778392" y="100886"/>
+            <a:ext cx="505438" cy="505438"/>
           </a:xfrm>
           <a:prstGeom prst="rect">
             <a:avLst/>
